--- a/curso_es/pptx/S76.pptx
+++ b/curso_es/pptx/S76.pptx
@@ -3903,7 +3903,7 @@
                 </a:solidFill>
                 <a:latin typeface="Nunito Sans"/>
               </a:rPr>
-              <a:t>Postura de Leire: «Quiero el ordenador ya». Postura de Aitor: «Lo quiero yo». Su madre les pregunta a cada uno: «¿Para qué lo necesitas?».</a:t>
+              <a:t>Postura de la chica: «Quiero el ordenador ya». Postura de su hermano: «Lo quiero yo». Su madre les pregunta a cada uno: «¿Para qué lo necesitas?».</a:t>
             </a:r>
           </a:p>
         </p:txBody>
@@ -3951,7 +3951,7 @@
                 </a:solidFill>
                 <a:latin typeface="Nunito Sans"/>
               </a:rPr>
-              <a:t>Interés de Leire: entregar un trabajo antes de las 20:00.</a:t>
+              <a:t>Interés de la chica: entregar un trabajo antes de las 20:00.</a:t>
             </a:r>
           </a:p>
           <a:p>
@@ -3976,7 +3976,7 @@
                 </a:solidFill>
                 <a:latin typeface="Nunito Sans"/>
               </a:rPr>
-              <a:t>Interés de Aitor: jugar online con su cuadrilla, que queda a las 21:00.</a:t>
+              <a:t>Interés de su hermano: jugar online con su cuadrilla, que queda a las 21:00.</a:t>
             </a:r>
           </a:p>
           <a:p>
@@ -4026,7 +4026,7 @@
                 </a:solidFill>
                 <a:latin typeface="Nunito Sans"/>
               </a:rPr>
-              <a:t>Conclusión: Leire lo usa hasta las 20:00 y Aitor después. Mirar el interés permite colaborar.</a:t>
+              <a:t>Conclusión: la chica lo usa hasta las 20:00 y su hermano después. Mirar el interés permite colaborar.</a:t>
             </a:r>
           </a:p>
         </p:txBody>
@@ -4212,7 +4212,7 @@
                 </a:solidFill>
                 <a:latin typeface="Nunito Sans"/>
               </a:rPr>
-              <a:t>Excursión a Urdaibai. Chen quiere ir en la ventanilla. A Maialen le da igual, pero Chen se marea si no mira fuera.</a:t>
+              <a:t>Excursión a Urdaibai. Un chico quiere ir en la ventanilla. A una compañera le da igual, pero él se marea si no mira fuera.</a:t>
             </a:r>
           </a:p>
         </p:txBody>
@@ -4260,7 +4260,7 @@
                 </a:solidFill>
                 <a:latin typeface="Nunito Sans"/>
               </a:rPr>
-              <a:t>¿Qué actitud tiene sentido para Maialen? Ceder.</a:t>
+              <a:t>¿Qué actitud tiene sentido para la compañera? Ceder.</a:t>
             </a:r>
           </a:p>
           <a:p>
@@ -4285,7 +4285,7 @@
                 </a:solidFill>
                 <a:latin typeface="Nunito Sans"/>
               </a:rPr>
-              <a:t>¿Por qué ceder? A ella casi no le importa y a Chen le importa mucho.</a:t>
+              <a:t>¿Por qué ceder? A ella casi no le importa y a él le importa mucho.</a:t>
             </a:r>
           </a:p>
           <a:p>
@@ -4521,7 +4521,7 @@
                 </a:solidFill>
                 <a:latin typeface="Nunito Sans"/>
               </a:rPr>
-              <a:t>Omar presume: «En mi cuadrilla nunca hay conflictos». Pero Naiara siempre cede, y Kevin se calla cuando algo no le gusta.</a:t>
+              <a:t>Un chico presume: «En mi cuadrilla nunca hay conflictos». Pero una del grupo siempre cede, y otro se calla cuando algo no le gusta.</a:t>
             </a:r>
           </a:p>
         </p:txBody>
@@ -4619,7 +4619,7 @@
                 </a:solidFill>
                 <a:latin typeface="Nunito Sans"/>
               </a:rPr>
-              <a:t>Pero Naiara siempre cede y Kevin siempre evita. Los conflictos están, solo que escondidos.</a:t>
+              <a:t>Pero una siempre cede y otro siempre evita. Los conflictos están, solo que escondidos.</a:t>
             </a:r>
           </a:p>
           <a:p>
@@ -6229,7 +6229,7 @@
                 </a:solidFill>
                 <a:latin typeface="Nunito Sans"/>
               </a:rPr>
-              <a:t>Leire y su hermano Aitor quieren el ordenador de casa a la misma hora. Cada uno grita: «¡Lo pedí yo primero!». Nadie cede.</a:t>
+              <a:t>Una chica y su hermano quieren el ordenador de casa a la misma hora. Cada uno grita: «¡Lo pedí yo primero!». Nadie cede.</a:t>
             </a:r>
           </a:p>
         </p:txBody>
